--- a/GroundTruth/NormalizeDate_GroundTruth.pptx
+++ b/GroundTruth/NormalizeDate_GroundTruth.pptx
@@ -4981,7 +4981,7 @@
                 <a:effectLst/>
                 <a:ea typeface="Times New Roman" panose="02020603050405020304" pitchFamily="18" charset="0"/>
               </a:rPr>
-              <a:t>Article 3 - Chapter VI of Federal Law No. 164-FZ of October 19, 1998 "On Financial Lease (Leasing)" (Collected Legislation of the Russian Federation, 1998, No. 44, Art. 5394; 2002, No. 5, Art. 376) </a:t>
+              <a:t>Article 3 - Chapter VI of Federal Law No. 164-FZ of October 29, 1998 "On Financial Lease (Leasing)" (Collected Legislation of the Russian Federation, 1998, No. 44, Art. 5394; 2002, No. 5, Art. 376) </a:t>
             </a:r>
             <a:r>
               <a:rPr lang="en-US" sz="1200" dirty="0">
@@ -5585,7 +5585,7 @@
                 <a:ea typeface="SimSun" panose="02010600030101010101" pitchFamily="2" charset="-122"/>
                 <a:cs typeface="Times New Roman" panose="02020603050405020304" pitchFamily="18" charset="0"/>
               </a:rPr>
-              <a:t> as valid for the period up to 1 September 2022 (</a:t>
+              <a:t> as valid for the period up to September 1, 2022 (</a:t>
             </a:r>
             <a:r>
               <a:rPr kumimoji="0" lang="en-GB" altLang="zh-CN" sz="1200" b="0" i="0" u="none" strike="noStrike" cap="none" normalizeH="0" baseline="0" dirty="0">
@@ -5599,7 +5599,7 @@
                 <a:ea typeface="SimSun" panose="02010600030101010101" pitchFamily="2" charset="-122"/>
                 <a:cs typeface="Times New Roman" panose="02020603050405020304" pitchFamily="18" charset="0"/>
               </a:rPr>
-              <a:t>including those certificates which expired after 1 March 2022)</a:t>
+              <a:t>including those certificates which expired after March 1, 2022)</a:t>
             </a:r>
             <a:r>
               <a:rPr kumimoji="0" lang="en-US" altLang="zh-CN" sz="1200" b="0" i="0" u="none" strike="noStrike" cap="none" normalizeH="0" baseline="0" dirty="0">
@@ -7282,7 +7282,7 @@
                 <a:effectLst/>
                 <a:ea typeface="Times New Roman" panose="02020603050405020304" pitchFamily="18" charset="0"/>
               </a:rPr>
-              <a:t> 7,</a:t>
+              <a:t> 12,</a:t>
             </a:r>
             <a:r>
               <a:rPr lang="ru-RU" sz="1800" dirty="0">
@@ -7521,7 +7521,7 @@
           <a:p>
             <a:r>
               <a:rPr lang="en-US" dirty="0"/>
-              <a:t>Council Regulation (EU) 2022/328 of 25 February 2022 amending Regulation (EU) No 833/2014 concerning restrictive measures in view of Russia's actions </a:t>
+              <a:t>Council Regulation (EU) 2022/328 of February 25, 2022 amending Regulation (EU) No 833/2014 concerning restrictive measures in view of Russia's actions </a:t>
             </a:r>
             <a:r>
               <a:rPr lang="en-US" dirty="0" err="1"/>
@@ -8017,7 +8017,7 @@
                 <a:effectLst/>
                 <a:ea typeface="Times New Roman" panose="02020603050405020304" pitchFamily="18" charset="0"/>
               </a:rPr>
-              <a:t>Article 3c(5) of Council Regulation (EU) No 833/2014, read in conjunction with Articles 3c(4)(b) and 1(o) of the same Regulation, allows, until March 28, 2022, the provision of insurance or reinsurance to leasing companies for aircraft and engines subject to operating or finance lease arrangements signed before February 26 2022, including when such aircraft or engine is used in Russia or leased to a Russian person.</a:t>
+              <a:t>Article 3c(5) of Council Regulation (EU) No 833/2014, read in conjunction with Articles 3c(4)(b) and 1(o) of the same Regulation, allows, until March 28, 2022, the provision of insurance or reinsurance to leasing companies for aircraft and engines subject to operating or finance lease arrangements signed before February 26, 2022, including when such aircraft or engine is used in Russia or leased to a Russian person.</a:t>
             </a:r>
             <a:endParaRPr lang="en-US" sz="1800" dirty="0">
               <a:effectLst/>
